--- a/Monet_Defense_Presentation.pptx
+++ b/Monet_Defense_Presentation.pptx
@@ -3254,18 +3254,11 @@
             </a:pPr>
             <a:r>
               <a:rPr lang="en-US" sz="1600" dirty="0"/>
-              <a:t>Runs locally on your computer to flag AI-generated short videos in real time. </a:t>
-            </a:r>
-          </a:p>
-          <a:p>
-            <a:pPr algn="l">
-              <a:spcBef>
-                <a:spcPts val="0"/>
-              </a:spcBef>
-              <a:spcAft>
-                <a:spcPts val="200"/>
-              </a:spcAft>
-            </a:pPr>
+              <a:t>Runs locally on your computer to flag AI-generated short videos in real time.</a:t>
+            </a:r>
+            <a:br>
+              <a:rPr lang="en-US" sz="1600" dirty="0"/>
+            </a:br>
             <a:r>
               <a:rPr lang="en-US" sz="1600" dirty="0"/>
               <a:t>Your videos never leave your device.</a:t>
@@ -3308,7 +3301,7 @@
               </a:spcAft>
             </a:pPr>
             <a:r>
-              <a:rPr sz="1400" b="0" i="0" dirty="0">
+              <a:rPr lang="en-US" sz="1400" b="1" i="0" dirty="0">
                 <a:solidFill>
                   <a:srgbClr val="3D3D3D"/>
                 </a:solidFill>
@@ -3323,7 +3316,7 @@
                 </a:solidFill>
                 <a:latin typeface="Calibri"/>
               </a:rPr>
-              <a:t>Priti Singh Nepali, Bipul Kunwar</a:t>
+              <a:t>Priti Singh Nepali</a:t>
             </a:r>
             <a:endParaRPr sz="1400" b="0" i="0" dirty="0">
               <a:solidFill>
@@ -3342,7 +3335,7 @@
               </a:spcAft>
             </a:pPr>
             <a:r>
-              <a:rPr sz="1400" b="0" i="0" dirty="0">
+              <a:rPr sz="1400" b="1" i="0" dirty="0">
                 <a:solidFill>
                   <a:srgbClr val="3D3D3D"/>
                 </a:solidFill>
@@ -3400,8 +3393,23 @@
                 </a:solidFill>
                 <a:latin typeface="Calibri"/>
               </a:rPr>
-              <a:t>Tribhuvan University</a:t>
-            </a:r>
+              <a:t>Tribhuvan</a:t>
+            </a:r>
+            <a:r>
+              <a:rPr lang="en-US" sz="1400" b="0" i="1" dirty="0">
+                <a:solidFill>
+                  <a:srgbClr val="666666"/>
+                </a:solidFill>
+                <a:latin typeface="Calibri"/>
+              </a:rPr>
+              <a:t> University</a:t>
+            </a:r>
+            <a:endParaRPr sz="1400" b="0" i="1" dirty="0">
+              <a:solidFill>
+                <a:srgbClr val="666666"/>
+              </a:solidFill>
+              <a:latin typeface="Calibri"/>
+            </a:endParaRPr>
           </a:p>
         </p:txBody>
       </p:sp>
@@ -4559,32 +4567,13 @@
               </a:spcAft>
             </a:pPr>
             <a:r>
-              <a:rPr sz="1450" b="0" i="0">
+              <a:rPr sz="1450" b="0" i="0" dirty="0">
                 <a:solidFill>
                   <a:srgbClr val="3D3D3D"/>
                 </a:solidFill>
                 <a:latin typeface="Calibri"/>
               </a:rPr>
               <a:t>951 real videos and 408 AI videos were labeled correctly; only 8 were wrongly accused.</a:t>
-            </a:r>
-          </a:p>
-          <a:p>
-            <a:pPr algn="ctr">
-              <a:spcBef>
-                <a:spcPts val="0"/>
-              </a:spcBef>
-              <a:spcAft>
-                <a:spcPts val="400"/>
-              </a:spcAft>
-            </a:pPr>
-            <a:r>
-              <a:rPr sz="1400" b="0" i="1">
-                <a:solidFill>
-                  <a:srgbClr val="666666"/>
-                </a:solidFill>
-                <a:latin typeface="Calibri"/>
-              </a:rPr>
-              <a:t>It misses about 1 in 4 AI videos (154) — a deliberate choice to avoid wrongly flagging real videos.</a:t>
             </a:r>
           </a:p>
         </p:txBody>
@@ -5571,7 +5560,7 @@
         </p:nvSpPr>
         <p:spPr>
           <a:xfrm>
-            <a:off x="685800" y="5052061"/>
+            <a:off x="685800" y="5031302"/>
             <a:ext cx="10881360" cy="365760"/>
           </a:xfrm>
           <a:prstGeom prst="rect">
@@ -7219,7 +7208,7 @@
         <p:spPr>
           <a:xfrm>
             <a:off x="640080" y="5029200"/>
-            <a:ext cx="10927080" cy="868680"/>
+            <a:ext cx="10927080" cy="1005840"/>
           </a:xfrm>
           <a:prstGeom prst="rect">
             <a:avLst/>
@@ -7266,7 +7255,7 @@
         <p:spPr>
           <a:xfrm>
             <a:off x="914400" y="5212080"/>
-            <a:ext cx="10424160" cy="475488"/>
+            <a:ext cx="10424160" cy="548640"/>
           </a:xfrm>
           <a:prstGeom prst="rect">
             <a:avLst/>
@@ -9053,7 +9042,7 @@
                 </a:solidFill>
                 <a:latin typeface="Calibri"/>
               </a:rPr>
-              <a:t>The AI Image Detector  (Vision Transformer)</a:t>
+              <a:t>The AI Image Detector</a:t>
             </a:r>
           </a:p>
         </p:txBody>
@@ -9142,7 +9131,7 @@
         <p:spPr>
           <a:xfrm>
             <a:off x="640080" y="1463040"/>
-            <a:ext cx="10927080" cy="1188720"/>
+            <a:ext cx="10927080" cy="1325880"/>
           </a:xfrm>
           <a:prstGeom prst="rect">
             <a:avLst/>
@@ -9188,8 +9177,8 @@
         </p:nvSpPr>
         <p:spPr>
           <a:xfrm>
-            <a:off x="914400" y="1627632"/>
-            <a:ext cx="10424160" cy="1005840"/>
+            <a:off x="914400" y="1645920"/>
+            <a:ext cx="10424160" cy="1097280"/>
           </a:xfrm>
           <a:prstGeom prst="rect">
             <a:avLst/>
@@ -9209,7 +9198,7 @@
               </a:spcAft>
             </a:pPr>
             <a:r>
-              <a:rPr sz="1500" b="1" i="0">
+              <a:rPr sz="1550" b="1" i="0">
                 <a:solidFill>
                   <a:srgbClr val="222222"/>
                 </a:solidFill>
@@ -9218,13 +9207,13 @@
               <a:t>What it is:  </a:t>
             </a:r>
             <a:r>
-              <a:rPr sz="1500" b="0" i="0">
+              <a:rPr sz="1550" b="0" i="0">
                 <a:solidFill>
                   <a:srgbClr val="3D3D3D"/>
                 </a:solidFill>
                 <a:latin typeface="Calibri"/>
               </a:rPr>
-              <a:t>a deep neural network called a Vision Transformer. It cuts an image into small 14×14 patches and reads them like words in a sentence, so it learns the visual “style” of AI-made images. Our detector joins two such models — SigLIP2 + DINOv2 — and is the strongest single signal we use. (Pre-trained via transfer learning; I run it, I did not train it.)</a:t>
+              <a:t>a pre-trained AI model (in fact two open-source models combined) that is good at telling AI-made images from real ones. It is the strongest single signal we use.</a:t>
             </a:r>
           </a:p>
         </p:txBody>
@@ -9237,8 +9226,8 @@
         </p:nvSpPr>
         <p:spPr>
           <a:xfrm>
-            <a:off x="640080" y="2880360"/>
-            <a:ext cx="5669280" cy="320040"/>
+            <a:off x="640080" y="3063240"/>
+            <a:ext cx="5120640" cy="320040"/>
           </a:xfrm>
           <a:prstGeom prst="rect">
             <a:avLst/>
@@ -9264,7 +9253,7 @@
                 </a:solidFill>
                 <a:latin typeface="Calibri"/>
               </a:rPr>
-              <a:t>HOW IT WORKS   (pseudocode)</a:t>
+              <a:t>HOW IT IS USED</a:t>
             </a:r>
           </a:p>
         </p:txBody>
@@ -9277,8 +9266,8 @@
         </p:nvCxnSpPr>
         <p:spPr>
           <a:xfrm>
-            <a:off x="640080" y="3209544"/>
-            <a:ext cx="5669280" cy="0"/>
+            <a:off x="640080" y="3392424"/>
+            <a:ext cx="5120640" cy="0"/>
           </a:xfrm>
           <a:prstGeom prst="line">
             <a:avLst/>
@@ -9306,48 +9295,134 @@
       </p:cxnSp>
       <p:sp>
         <p:nvSpPr>
-          <p:cNvPr id="9" name="Rectangle 8"/>
-          <p:cNvSpPr/>
-          <p:nvPr/>
-        </p:nvSpPr>
-        <p:spPr>
-          <a:xfrm>
-            <a:off x="640080" y="3310128"/>
-            <a:ext cx="5669280" cy="2907792"/>
-          </a:xfrm>
-          <a:prstGeom prst="rect">
-            <a:avLst/>
-          </a:prstGeom>
-          <a:solidFill>
-            <a:srgbClr val="222222"/>
-          </a:solidFill>
-          <a:ln w="9525">
-            <a:solidFill>
-              <a:srgbClr val="CFCFCF"/>
-            </a:solidFill>
-          </a:ln>
-          <a:effectLst/>
-        </p:spPr>
-        <p:style>
-          <a:lnRef idx="1">
-            <a:schemeClr val="accent1"/>
-          </a:lnRef>
-          <a:fillRef idx="3">
-            <a:schemeClr val="accent1"/>
-          </a:fillRef>
-          <a:effectRef idx="2">
-            <a:schemeClr val="accent1"/>
-          </a:effectRef>
-          <a:fontRef idx="minor">
-            <a:schemeClr val="lt1"/>
-          </a:fontRef>
-        </p:style>
-        <p:txBody>
-          <a:bodyPr rtlCol="0" anchor="ctr"/>
-          <a:lstStyle/>
-          <a:p>
-            <a:pPr algn="ctr"/>
-            <a:endParaRPr/>
+          <p:cNvPr id="9" name="TextBox 8"/>
+          <p:cNvSpPr txBox="1"/>
+          <p:nvPr/>
+        </p:nvSpPr>
+        <p:spPr>
+          <a:xfrm>
+            <a:off x="640080" y="3611880"/>
+            <a:ext cx="5120640" cy="2743200"/>
+          </a:xfrm>
+          <a:prstGeom prst="rect">
+            <a:avLst/>
+          </a:prstGeom>
+          <a:noFill/>
+        </p:spPr>
+        <p:txBody>
+          <a:bodyPr wrap="square"/>
+          <a:lstStyle/>
+          <a:p>
+            <a:pPr algn="l">
+              <a:spcBef>
+                <a:spcPts val="0"/>
+              </a:spcBef>
+              <a:spcAft>
+                <a:spcPts val="1100"/>
+              </a:spcAft>
+            </a:pPr>
+            <a:r>
+              <a:rPr sz="1500" b="1">
+                <a:solidFill>
+                  <a:srgbClr val="666666"/>
+                </a:solidFill>
+                <a:latin typeface="Calibri"/>
+              </a:rPr>
+              <a:t>•  </a:t>
+            </a:r>
+            <a:r>
+              <a:rPr sz="1500" b="0" i="0">
+                <a:solidFill>
+                  <a:srgbClr val="3D3D3D"/>
+                </a:solidFill>
+                <a:latin typeface="Calibri"/>
+              </a:rPr>
+              <a:t>Looks at 3 frames taken from the video.</a:t>
+            </a:r>
+          </a:p>
+          <a:p>
+            <a:pPr algn="l">
+              <a:spcBef>
+                <a:spcPts val="0"/>
+              </a:spcBef>
+              <a:spcAft>
+                <a:spcPts val="1100"/>
+              </a:spcAft>
+            </a:pPr>
+            <a:r>
+              <a:rPr sz="1500" b="1">
+                <a:solidFill>
+                  <a:srgbClr val="666666"/>
+                </a:solidFill>
+                <a:latin typeface="Calibri"/>
+              </a:rPr>
+              <a:t>•  </a:t>
+            </a:r>
+            <a:r>
+              <a:rPr sz="1500" b="0" i="0">
+                <a:solidFill>
+                  <a:srgbClr val="3D3D3D"/>
+                </a:solidFill>
+                <a:latin typeface="Calibri"/>
+              </a:rPr>
+              <a:t>Gives each frame an "AI chance" between 0 and 1.</a:t>
+            </a:r>
+          </a:p>
+          <a:p>
+            <a:pPr algn="l">
+              <a:spcBef>
+                <a:spcPts val="0"/>
+              </a:spcBef>
+              <a:spcAft>
+                <a:spcPts val="1100"/>
+              </a:spcAft>
+            </a:pPr>
+            <a:r>
+              <a:rPr sz="1500" b="1">
+                <a:solidFill>
+                  <a:srgbClr val="666666"/>
+                </a:solidFill>
+                <a:latin typeface="Calibri"/>
+              </a:rPr>
+              <a:t>•  </a:t>
+            </a:r>
+            <a:r>
+              <a:rPr sz="1500" b="0" i="0">
+                <a:solidFill>
+                  <a:srgbClr val="3D3D3D"/>
+                </a:solidFill>
+                <a:latin typeface="Calibri"/>
+              </a:rPr>
+              <a:t>We use the highest chance it finds.</a:t>
+            </a:r>
+          </a:p>
+          <a:p>
+            <a:pPr algn="l">
+              <a:spcBef>
+                <a:spcPts val="0"/>
+              </a:spcBef>
+              <a:spcAft>
+                <a:spcPts val="1100"/>
+              </a:spcAft>
+            </a:pPr>
+            <a:r>
+              <a:rPr sz="1500" b="1">
+                <a:solidFill>
+                  <a:srgbClr val="666666"/>
+                </a:solidFill>
+                <a:latin typeface="Calibri"/>
+              </a:rPr>
+              <a:t>•  </a:t>
+            </a:r>
+            <a:r>
+              <a:rPr sz="1500" b="0" i="0">
+                <a:solidFill>
+                  <a:srgbClr val="3D3D3D"/>
+                </a:solidFill>
+                <a:latin typeface="Calibri"/>
+              </a:rPr>
+              <a:t>One fake-looking frame is enough evidence.</a:t>
+            </a:r>
           </a:p>
         </p:txBody>
       </p:sp>
@@ -9359,8 +9434,8 @@
         </p:nvSpPr>
         <p:spPr>
           <a:xfrm>
-            <a:off x="896112" y="3474720"/>
-            <a:ext cx="5166360" cy="2651760"/>
+            <a:off x="6355080" y="3063240"/>
+            <a:ext cx="5212080" cy="320040"/>
           </a:xfrm>
           <a:prstGeom prst="rect">
             <a:avLst/>
@@ -9376,290 +9451,6 @@
                 <a:spcPts val="0"/>
               </a:spcBef>
               <a:spcAft>
-                <a:spcPts val="100"/>
-              </a:spcAft>
-            </a:pPr>
-            <a:r>
-              <a:rPr sz="1150" b="0" i="0">
-                <a:solidFill>
-                  <a:srgbClr val="E7E7E7"/>
-                </a:solidFill>
-                <a:latin typeface="Consolas"/>
-              </a:rPr>
-              <a:t> </a:t>
-            </a:r>
-            <a:r>
-              <a:rPr sz="1150" b="0" i="0">
-                <a:solidFill>
-                  <a:srgbClr val="909090"/>
-                </a:solidFill>
-                <a:latin typeface="Consolas"/>
-              </a:rPr>
-              <a:t># 1. Cut the image into 14x14 pixel patches</a:t>
-            </a:r>
-          </a:p>
-          <a:p>
-            <a:pPr algn="l">
-              <a:spcBef>
-                <a:spcPts val="0"/>
-              </a:spcBef>
-              <a:spcAft>
-                <a:spcPts val="100"/>
-              </a:spcAft>
-            </a:pPr>
-            <a:r>
-              <a:rPr sz="1150" b="0" i="0">
-                <a:solidFill>
-                  <a:srgbClr val="E7E7E7"/>
-                </a:solidFill>
-                <a:latin typeface="Consolas"/>
-              </a:rPr>
-              <a:t>patches = split_into_patches(image, 14)</a:t>
-            </a:r>
-          </a:p>
-          <a:p>
-            <a:pPr algn="l">
-              <a:spcBef>
-                <a:spcPts val="0"/>
-              </a:spcBef>
-              <a:spcAft>
-                <a:spcPts val="100"/>
-              </a:spcAft>
-            </a:pPr>
-            <a:r>
-              <a:rPr sz="1150" b="0" i="0">
-                <a:solidFill>
-                  <a:srgbClr val="E7E7E7"/>
-                </a:solidFill>
-                <a:latin typeface="Consolas"/>
-              </a:rPr>
-              <a:t> </a:t>
-            </a:r>
-          </a:p>
-          <a:p>
-            <a:pPr algn="l">
-              <a:spcBef>
-                <a:spcPts val="0"/>
-              </a:spcBef>
-              <a:spcAft>
-                <a:spcPts val="100"/>
-              </a:spcAft>
-            </a:pPr>
-            <a:r>
-              <a:rPr sz="1150" b="0" i="0">
-                <a:solidFill>
-                  <a:srgbClr val="E7E7E7"/>
-                </a:solidFill>
-                <a:latin typeface="Consolas"/>
-              </a:rPr>
-              <a:t> </a:t>
-            </a:r>
-            <a:r>
-              <a:rPr sz="1150" b="0" i="0">
-                <a:solidFill>
-                  <a:srgbClr val="909090"/>
-                </a:solidFill>
-                <a:latin typeface="Consolas"/>
-              </a:rPr>
-              <a:t># 2. Two Vision Transformers read the patches</a:t>
-            </a:r>
-          </a:p>
-          <a:p>
-            <a:pPr algn="l">
-              <a:spcBef>
-                <a:spcPts val="0"/>
-              </a:spcBef>
-              <a:spcAft>
-                <a:spcPts val="100"/>
-              </a:spcAft>
-            </a:pPr>
-            <a:r>
-              <a:rPr sz="1150" b="0" i="0">
-                <a:solidFill>
-                  <a:srgbClr val="E7E7E7"/>
-                </a:solidFill>
-                <a:latin typeface="Consolas"/>
-              </a:rPr>
-              <a:t>a = SigLIP2(patches)        </a:t>
-            </a:r>
-            <a:r>
-              <a:rPr sz="1150" b="0" i="0">
-                <a:solidFill>
-                  <a:srgbClr val="909090"/>
-                </a:solidFill>
-                <a:latin typeface="Consolas"/>
-              </a:rPr>
-              <a:t># what the scene shows</a:t>
-            </a:r>
-          </a:p>
-          <a:p>
-            <a:pPr algn="l">
-              <a:spcBef>
-                <a:spcPts val="0"/>
-              </a:spcBef>
-              <a:spcAft>
-                <a:spcPts val="100"/>
-              </a:spcAft>
-            </a:pPr>
-            <a:r>
-              <a:rPr sz="1150" b="0" i="0">
-                <a:solidFill>
-                  <a:srgbClr val="E7E7E7"/>
-                </a:solidFill>
-                <a:latin typeface="Consolas"/>
-              </a:rPr>
-              <a:t>b = DINOv2(patches)         </a:t>
-            </a:r>
-            <a:r>
-              <a:rPr sz="1150" b="0" i="0">
-                <a:solidFill>
-                  <a:srgbClr val="909090"/>
-                </a:solidFill>
-                <a:latin typeface="Consolas"/>
-              </a:rPr>
-              <a:t># fine texture / detail</a:t>
-            </a:r>
-          </a:p>
-          <a:p>
-            <a:pPr algn="l">
-              <a:spcBef>
-                <a:spcPts val="0"/>
-              </a:spcBef>
-              <a:spcAft>
-                <a:spcPts val="100"/>
-              </a:spcAft>
-            </a:pPr>
-            <a:r>
-              <a:rPr sz="1150" b="0" i="0">
-                <a:solidFill>
-                  <a:srgbClr val="E7E7E7"/>
-                </a:solidFill>
-                <a:latin typeface="Consolas"/>
-              </a:rPr>
-              <a:t> </a:t>
-            </a:r>
-          </a:p>
-          <a:p>
-            <a:pPr algn="l">
-              <a:spcBef>
-                <a:spcPts val="0"/>
-              </a:spcBef>
-              <a:spcAft>
-                <a:spcPts val="100"/>
-              </a:spcAft>
-            </a:pPr>
-            <a:r>
-              <a:rPr sz="1150" b="0" i="0">
-                <a:solidFill>
-                  <a:srgbClr val="E7E7E7"/>
-                </a:solidFill>
-                <a:latin typeface="Consolas"/>
-              </a:rPr>
-              <a:t> </a:t>
-            </a:r>
-            <a:r>
-              <a:rPr sz="1150" b="0" i="0">
-                <a:solidFill>
-                  <a:srgbClr val="909090"/>
-                </a:solidFill>
-                <a:latin typeface="Consolas"/>
-              </a:rPr>
-              <a:t># 3. Join the two views, then classify</a:t>
-            </a:r>
-          </a:p>
-          <a:p>
-            <a:pPr algn="l">
-              <a:spcBef>
-                <a:spcPts val="0"/>
-              </a:spcBef>
-              <a:spcAft>
-                <a:spcPts val="100"/>
-              </a:spcAft>
-            </a:pPr>
-            <a:r>
-              <a:rPr sz="1150" b="0" i="0">
-                <a:solidFill>
-                  <a:srgbClr val="E7E7E7"/>
-                </a:solidFill>
-                <a:latin typeface="Consolas"/>
-              </a:rPr>
-              <a:t>combined = concat(a, b)</a:t>
-            </a:r>
-          </a:p>
-          <a:p>
-            <a:pPr algn="l">
-              <a:spcBef>
-                <a:spcPts val="0"/>
-              </a:spcBef>
-              <a:spcAft>
-                <a:spcPts val="100"/>
-              </a:spcAft>
-            </a:pPr>
-            <a:r>
-              <a:rPr sz="1150" b="0" i="0">
-                <a:solidFill>
-                  <a:srgbClr val="E7E7E7"/>
-                </a:solidFill>
-                <a:latin typeface="Consolas"/>
-              </a:rPr>
-              <a:t>logit = classifier(combined)</a:t>
-            </a:r>
-          </a:p>
-          <a:p>
-            <a:pPr algn="l">
-              <a:spcBef>
-                <a:spcPts val="0"/>
-              </a:spcBef>
-              <a:spcAft>
-                <a:spcPts val="100"/>
-              </a:spcAft>
-            </a:pPr>
-            <a:r>
-              <a:rPr sz="1150" b="0" i="0">
-                <a:solidFill>
-                  <a:srgbClr val="E7E7E7"/>
-                </a:solidFill>
-                <a:latin typeface="Consolas"/>
-              </a:rPr>
-              <a:t>ai_chance = sigmoid(logit)  </a:t>
-            </a:r>
-            <a:r>
-              <a:rPr sz="1150" b="0" i="0">
-                <a:solidFill>
-                  <a:srgbClr val="909090"/>
-                </a:solidFill>
-                <a:latin typeface="Consolas"/>
-              </a:rPr>
-              <a:t># -&gt; between 0 and 1</a:t>
-            </a:r>
-          </a:p>
-        </p:txBody>
-      </p:sp>
-      <p:sp>
-        <p:nvSpPr>
-          <p:cNvPr id="11" name="TextBox 10"/>
-          <p:cNvSpPr txBox="1"/>
-          <p:nvPr/>
-        </p:nvSpPr>
-        <p:spPr>
-          <a:xfrm>
-            <a:off x="6537960" y="2880360"/>
-            <a:ext cx="5029200" cy="320040"/>
-          </a:xfrm>
-          <a:prstGeom prst="rect">
-            <a:avLst/>
-          </a:prstGeom>
-          <a:noFill/>
-        </p:spPr>
-        <p:txBody>
-          <a:bodyPr wrap="square" anchor="t"/>
-          <a:lstStyle/>
-          <a:p>
-            <a:pPr algn="l">
-              <a:spcBef>
-                <a:spcPts val="0"/>
-              </a:spcBef>
-              <a:spcAft>
                 <a:spcPts val="200"/>
               </a:spcAft>
             </a:pPr>
@@ -9670,21 +9461,21 @@
                 </a:solidFill>
                 <a:latin typeface="Calibri"/>
               </a:rPr>
-              <a:t>KEY IDEAS</a:t>
+              <a:t>HONEST NOTE</a:t>
             </a:r>
           </a:p>
         </p:txBody>
       </p:sp>
       <p:cxnSp>
         <p:nvCxnSpPr>
-          <p:cNvPr id="12" name="Connector 11"/>
+          <p:cNvPr id="11" name="Connector 10"/>
           <p:cNvCxnSpPr/>
           <p:nvPr/>
         </p:nvCxnSpPr>
         <p:spPr>
           <a:xfrm>
-            <a:off x="6537960" y="3209544"/>
-            <a:ext cx="5029200" cy="0"/>
+            <a:off x="6355080" y="3392424"/>
+            <a:ext cx="5212080" cy="0"/>
           </a:xfrm>
           <a:prstGeom prst="line">
             <a:avLst/>
@@ -9712,14 +9503,14 @@
       </p:cxnSp>
       <p:sp>
         <p:nvSpPr>
-          <p:cNvPr id="13" name="TextBox 12"/>
+          <p:cNvPr id="12" name="TextBox 11"/>
           <p:cNvSpPr txBox="1"/>
           <p:nvPr/>
         </p:nvSpPr>
         <p:spPr>
           <a:xfrm>
-            <a:off x="6537960" y="3383280"/>
-            <a:ext cx="5029200" cy="1783080"/>
+            <a:off x="6355080" y="3611880"/>
+            <a:ext cx="5212080" cy="2743200"/>
           </a:xfrm>
           <a:prstGeom prst="rect">
             <a:avLst/>
@@ -9735,11 +9526,11 @@
                 <a:spcPts val="0"/>
               </a:spcBef>
               <a:spcAft>
-                <a:spcPts val="800"/>
-              </a:spcAft>
-            </a:pPr>
-            <a:r>
-              <a:rPr sz="1450" b="1">
+                <a:spcPts val="1100"/>
+              </a:spcAft>
+            </a:pPr>
+            <a:r>
+              <a:rPr sz="1500" b="1" dirty="0">
                 <a:solidFill>
                   <a:srgbClr val="666666"/>
                 </a:solidFill>
@@ -9748,13 +9539,13 @@
               <a:t>•  </a:t>
             </a:r>
             <a:r>
-              <a:rPr sz="1450" b="0" i="0">
+              <a:rPr sz="1500" b="0" i="0" dirty="0">
                 <a:solidFill>
                   <a:srgbClr val="3D3D3D"/>
                 </a:solidFill>
                 <a:latin typeface="Calibri"/>
               </a:rPr>
-              <a:t>Image split into 14×14 patches, read like words.</a:t>
+              <a:t>I did not train this model from scratch.</a:t>
             </a:r>
           </a:p>
           <a:p>
@@ -9763,11 +9554,11 @@
                 <a:spcPts val="0"/>
               </a:spcBef>
               <a:spcAft>
-                <a:spcPts val="800"/>
-              </a:spcAft>
-            </a:pPr>
-            <a:r>
-              <a:rPr sz="1450" b="1">
+                <a:spcPts val="1100"/>
+              </a:spcAft>
+            </a:pPr>
+            <a:r>
+              <a:rPr sz="1500" b="1" dirty="0">
                 <a:solidFill>
                   <a:srgbClr val="666666"/>
                 </a:solidFill>
@@ -9776,13 +9567,13 @@
               <a:t>•  </a:t>
             </a:r>
             <a:r>
-              <a:rPr sz="1450" b="0" i="0">
+              <a:rPr sz="1500" b="0" i="0" dirty="0">
                 <a:solidFill>
                   <a:srgbClr val="3D3D3D"/>
                 </a:solidFill>
                 <a:latin typeface="Calibri"/>
               </a:rPr>
-              <a:t>Two ViTs, trained differently, catch different fakes.</a:t>
+              <a:t>I used ready-made, open-source models.</a:t>
             </a:r>
           </a:p>
           <a:p>
@@ -9791,11 +9582,11 @@
                 <a:spcPts val="0"/>
               </a:spcBef>
               <a:spcAft>
-                <a:spcPts val="800"/>
-              </a:spcAft>
-            </a:pPr>
-            <a:r>
-              <a:rPr sz="1450" b="1">
+                <a:spcPts val="1100"/>
+              </a:spcAft>
+            </a:pPr>
+            <a:r>
+              <a:rPr sz="1500" b="1" dirty="0">
                 <a:solidFill>
                   <a:srgbClr val="666666"/>
                 </a:solidFill>
@@ -9804,243 +9595,31 @@
               <a:t>•  </a:t>
             </a:r>
             <a:r>
-              <a:rPr sz="1450" b="0" i="0">
+              <a:rPr sz="1500" b="0" i="0" dirty="0">
                 <a:solidFill>
                   <a:srgbClr val="3D3D3D"/>
                 </a:solidFill>
                 <a:latin typeface="Calibri"/>
               </a:rPr>
-              <a:t>SigLIP2 = scene meaning;  DINOv2 = fine texture.</a:t>
-            </a:r>
-          </a:p>
-          <a:p>
-            <a:pPr algn="l">
-              <a:spcBef>
-                <a:spcPts val="0"/>
-              </a:spcBef>
-              <a:spcAft>
-                <a:spcPts val="800"/>
-              </a:spcAft>
-            </a:pPr>
-            <a:r>
-              <a:rPr sz="1450" b="1">
-                <a:solidFill>
-                  <a:srgbClr val="666666"/>
-                </a:solidFill>
-                <a:latin typeface="Calibri"/>
-              </a:rPr>
-              <a:t>•  </a:t>
-            </a:r>
-            <a:r>
-              <a:rPr sz="1450" b="0" i="0">
+              <a:t>My work is the system around them: combining their</a:t>
+            </a:r>
+            <a:r>
+              <a:rPr lang="en-US" sz="1500" b="0" i="0" dirty="0">
                 <a:solidFill>
                   <a:srgbClr val="3D3D3D"/>
                 </a:solidFill>
                 <a:latin typeface="Calibri"/>
               </a:rPr>
-              <a:t>Sigmoid turns the output into a 0–1 chance.</a:t>
-            </a:r>
-          </a:p>
-        </p:txBody>
-      </p:sp>
-      <p:sp>
-        <p:nvSpPr>
-          <p:cNvPr id="14" name="TextBox 13"/>
-          <p:cNvSpPr txBox="1"/>
-          <p:nvPr/>
-        </p:nvSpPr>
-        <p:spPr>
-          <a:xfrm>
-            <a:off x="6537960" y="5074920"/>
-            <a:ext cx="5029200" cy="320040"/>
-          </a:xfrm>
-          <a:prstGeom prst="rect">
-            <a:avLst/>
-          </a:prstGeom>
-          <a:noFill/>
-        </p:spPr>
-        <p:txBody>
-          <a:bodyPr wrap="square" anchor="t"/>
-          <a:lstStyle/>
-          <a:p>
-            <a:pPr algn="l">
-              <a:spcBef>
-                <a:spcPts val="0"/>
-              </a:spcBef>
-              <a:spcAft>
-                <a:spcPts val="200"/>
-              </a:spcAft>
-            </a:pPr>
-            <a:r>
-              <a:rPr sz="1300" b="1" i="0">
-                <a:solidFill>
-                  <a:srgbClr val="222222"/>
-                </a:solidFill>
-                <a:latin typeface="Calibri"/>
-              </a:rPr>
-              <a:t>THE OUTPUT FORMULA  (sigmoid)</a:t>
-            </a:r>
-          </a:p>
-        </p:txBody>
-      </p:sp>
-      <p:cxnSp>
-        <p:nvCxnSpPr>
-          <p:cNvPr id="15" name="Connector 14"/>
-          <p:cNvCxnSpPr/>
-          <p:nvPr/>
-        </p:nvCxnSpPr>
-        <p:spPr>
-          <a:xfrm>
-            <a:off x="6537960" y="5404104"/>
-            <a:ext cx="5029200" cy="0"/>
-          </a:xfrm>
-          <a:prstGeom prst="line">
-            <a:avLst/>
-          </a:prstGeom>
-          <a:ln w="9525">
-            <a:solidFill>
-              <a:srgbClr val="CFCFCF"/>
-            </a:solidFill>
-          </a:ln>
-        </p:spPr>
-        <p:style>
-          <a:lnRef idx="2">
-            <a:schemeClr val="accent1"/>
-          </a:lnRef>
-          <a:fillRef idx="0">
-            <a:schemeClr val="accent1"/>
-          </a:fillRef>
-          <a:effectRef idx="1">
-            <a:schemeClr val="accent1"/>
-          </a:effectRef>
-          <a:fontRef idx="minor">
-            <a:schemeClr val="tx1"/>
-          </a:fontRef>
-        </p:style>
-      </p:cxnSp>
-      <p:sp>
-        <p:nvSpPr>
-          <p:cNvPr id="16" name="Rectangle 15"/>
-          <p:cNvSpPr/>
-          <p:nvPr/>
-        </p:nvSpPr>
-        <p:spPr>
-          <a:xfrm>
-            <a:off x="6537960" y="5504688"/>
-            <a:ext cx="5029200" cy="548640"/>
-          </a:xfrm>
-          <a:prstGeom prst="rect">
-            <a:avLst/>
-          </a:prstGeom>
-          <a:solidFill>
-            <a:srgbClr val="F2F2F2"/>
-          </a:solidFill>
-          <a:ln w="9525">
-            <a:solidFill>
-              <a:srgbClr val="CFCFCF"/>
-            </a:solidFill>
-          </a:ln>
-          <a:effectLst/>
-        </p:spPr>
-        <p:style>
-          <a:lnRef idx="1">
-            <a:schemeClr val="accent1"/>
-          </a:lnRef>
-          <a:fillRef idx="3">
-            <a:schemeClr val="accent1"/>
-          </a:fillRef>
-          <a:effectRef idx="2">
-            <a:schemeClr val="accent1"/>
-          </a:effectRef>
-          <a:fontRef idx="minor">
-            <a:schemeClr val="lt1"/>
-          </a:fontRef>
-        </p:style>
-        <p:txBody>
-          <a:bodyPr rtlCol="0" anchor="ctr"/>
-          <a:lstStyle/>
-          <a:p>
-            <a:pPr algn="ctr"/>
-            <a:endParaRPr/>
-          </a:p>
-        </p:txBody>
-      </p:sp>
-      <p:sp>
-        <p:nvSpPr>
-          <p:cNvPr id="17" name="TextBox 16"/>
-          <p:cNvSpPr txBox="1"/>
-          <p:nvPr/>
-        </p:nvSpPr>
-        <p:spPr>
-          <a:xfrm>
-            <a:off x="6537960" y="5504688"/>
-            <a:ext cx="5029200" cy="548640"/>
-          </a:xfrm>
-          <a:prstGeom prst="rect">
-            <a:avLst/>
-          </a:prstGeom>
-          <a:noFill/>
-        </p:spPr>
-        <p:txBody>
-          <a:bodyPr wrap="square" anchor="ctr"/>
-          <a:lstStyle/>
-          <a:p>
-            <a:pPr algn="ctr">
-              <a:spcBef>
-                <a:spcPts val="0"/>
-              </a:spcBef>
-              <a:spcAft>
-                <a:spcPts val="200"/>
-              </a:spcAft>
-            </a:pPr>
-            <a:r>
-              <a:rPr sz="1400" b="1" i="0" dirty="0">
-                <a:solidFill>
-                  <a:srgbClr val="222222"/>
-                </a:solidFill>
-                <a:latin typeface="Consolas"/>
-              </a:rPr>
-              <a:t>sigmoid(x)  =  1 / ( 1 + e^(−x) )</a:t>
-            </a:r>
-          </a:p>
-        </p:txBody>
-      </p:sp>
-      <p:sp>
-        <p:nvSpPr>
-          <p:cNvPr id="18" name="TextBox 17"/>
-          <p:cNvSpPr txBox="1"/>
-          <p:nvPr/>
-        </p:nvSpPr>
-        <p:spPr>
-          <a:xfrm>
-            <a:off x="6537960" y="6089904"/>
-            <a:ext cx="5029200" cy="274320"/>
-          </a:xfrm>
-          <a:prstGeom prst="rect">
-            <a:avLst/>
-          </a:prstGeom>
-          <a:noFill/>
-        </p:spPr>
-        <p:txBody>
-          <a:bodyPr wrap="square" anchor="t"/>
-          <a:lstStyle/>
-          <a:p>
-            <a:pPr algn="ctr">
-              <a:spcBef>
-                <a:spcPts val="0"/>
-              </a:spcBef>
-              <a:spcAft>
-                <a:spcPts val="200"/>
-              </a:spcAft>
-            </a:pPr>
-            <a:r>
-              <a:rPr sz="1100" b="0" i="1">
-                <a:solidFill>
-                  <a:srgbClr val="666666"/>
-                </a:solidFill>
-                <a:latin typeface="Calibri"/>
-              </a:rPr>
-              <a:t>turns any number into a probability between 0 and 1.</a:t>
+              <a:t> </a:t>
+            </a:r>
+            <a:r>
+              <a:rPr sz="1500" b="0" i="0" dirty="0">
+                <a:solidFill>
+                  <a:srgbClr val="3D3D3D"/>
+                </a:solidFill>
+                <a:latin typeface="Calibri"/>
+              </a:rPr>
+              <a:t>result with other checks to get a reliable score.</a:t>
             </a:r>
           </a:p>
         </p:txBody>
